--- a/Documentation/FlowZapp-Product-Concept.pptx
+++ b/Documentation/FlowZapp-Product-Concept.pptx
@@ -11246,7 +11246,7 @@
                 <a:cs typeface="Calibri"/>
                 <a:sym typeface="Calibri"/>
               </a:rPr>
-              <a:t>A chatbot trained on your own documents answers questions instantly, with citations back to the source SOP.</a:t>
+              <a:t>A chatbot that answers only from your approved documents — instantly, with citations back to the source SOP.</a:t>
             </a:r>
             <a:endParaRPr b="0" i="0" sz="1200" u="none" cap="none" strike="noStrike">
               <a:solidFill>
@@ -17272,7 +17272,7 @@
                 <a:cs typeface="Calibri"/>
                 <a:sym typeface="Calibri"/>
               </a:rPr>
-              <a:t>Trained only on your knowledge base, with citations to the source document.</a:t>
+              <a:t>Answers only from your approved knowledge base, with citations to the source document.</a:t>
             </a:r>
             <a:endParaRPr b="0" i="0" sz="1250" u="none" cap="none" strike="noStrike">
               <a:solidFill>
@@ -20215,7 +20215,7 @@
                 <a:cs typeface="Calibri"/>
                 <a:sym typeface="Calibri"/>
               </a:rPr>
-              <a:t>Basic AI search</a:t>
+              <a:t>5 video → SOP generations / mo</a:t>
             </a:r>
             <a:endParaRPr b="0" i="0" sz="1200" u="none" cap="none" strike="noStrike">
               <a:solidFill>
@@ -20281,6 +20281,112 @@
         <p:spPr>
           <a:xfrm>
             <a:off x="1828800" y="4937760"/>
+            <a:ext cx="2194560" cy="274320"/>
+          </a:xfrm>
+          <a:prstGeom prst="rect">
+            <a:avLst/>
+          </a:prstGeom>
+          <a:noFill/>
+          <a:ln>
+            <a:noFill/>
+          </a:ln>
+        </p:spPr>
+        <p:txBody>
+          <a:bodyPr anchorCtr="0" anchor="ctr" bIns="0" lIns="0" spcFirstLastPara="1" rIns="0" wrap="square" tIns="0">
+            <a:noAutofit/>
+          </a:bodyPr>
+          <a:lstStyle/>
+          <a:p>
+            <a:pPr indent="0" lvl="0" marL="0" marR="0" rtl="0" algn="l">
+              <a:spcBef>
+                <a:spcPts val="0"/>
+              </a:spcBef>
+              <a:spcAft>
+                <a:spcPts val="0"/>
+              </a:spcAft>
+              <a:buClr>
+                <a:srgbClr val="13272B"/>
+              </a:buClr>
+              <a:buSzPts val="1200"/>
+              <a:buFont typeface="Calibri"/>
+              <a:buNone/>
+            </a:pPr>
+            <a:r>
+              <a:rPr b="0" i="0" lang="en-US" sz="1200" u="none" cap="none" strike="noStrike">
+                <a:solidFill>
+                  <a:srgbClr val="13272B"/>
+                </a:solidFill>
+                <a:latin typeface="Calibri"/>
+                <a:ea typeface="Calibri"/>
+                <a:cs typeface="Calibri"/>
+                <a:sym typeface="Calibri"/>
+              </a:rPr>
+              <a:t>Basic AI search</a:t>
+            </a:r>
+            <a:endParaRPr b="0" i="0" sz="1200" u="none" cap="none" strike="noStrike">
+              <a:solidFill>
+                <a:schemeClr val="dk1"/>
+              </a:solidFill>
+              <a:latin typeface="Calibri"/>
+              <a:ea typeface="Calibri"/>
+              <a:cs typeface="Calibri"/>
+              <a:sym typeface="Calibri"/>
+            </a:endParaRPr>
+          </a:p>
+        </p:txBody>
+      </p:sp>
+      <p:sp>
+        <p:nvSpPr>
+          <p:cNvPr id="308" name="Google Shape;308;p8"/>
+          <p:cNvSpPr/>
+          <p:nvPr/>
+        </p:nvSpPr>
+        <p:spPr>
+          <a:xfrm>
+            <a:off x="1572768" y="5385816"/>
+            <a:ext cx="100584" cy="100584"/>
+          </a:xfrm>
+          <a:prstGeom prst="ellipse">
+            <a:avLst/>
+          </a:prstGeom>
+          <a:solidFill>
+            <a:srgbClr val="028090"/>
+          </a:solidFill>
+          <a:ln>
+            <a:noFill/>
+          </a:ln>
+        </p:spPr>
+        <p:txBody>
+          <a:bodyPr anchorCtr="0" anchor="ctr" bIns="91425" lIns="91425" spcFirstLastPara="1" rIns="91425" wrap="square" tIns="91425">
+            <a:noAutofit/>
+          </a:bodyPr>
+          <a:lstStyle/>
+          <a:p>
+            <a:pPr indent="0" lvl="0" marL="0" rtl="0" algn="l">
+              <a:spcBef>
+                <a:spcPts val="0"/>
+              </a:spcBef>
+              <a:spcAft>
+                <a:spcPts val="0"/>
+              </a:spcAft>
+              <a:buNone/>
+            </a:pPr>
+            <a:r>
+              <a:t/>
+            </a:r>
+            <a:endParaRPr/>
+          </a:p>
+        </p:txBody>
+      </p:sp>
+      <p:sp>
+        <p:nvSpPr>
+          <p:cNvPr id="309" name="Google Shape;309;p8"/>
+          <p:cNvSpPr/>
+          <p:nvPr/>
+        </p:nvSpPr>
+        <p:spPr>
+          <a:xfrm>
+            <a:off x="1828800" y="5303520"/>
             <a:ext cx="2194560" cy="274320"/>
           </a:xfrm>
           <a:prstGeom prst="rect">
@@ -20337,112 +20443,6 @@
       </p:sp>
       <p:sp>
         <p:nvSpPr>
-          <p:cNvPr id="308" name="Google Shape;308;p8"/>
-          <p:cNvSpPr/>
-          <p:nvPr/>
-        </p:nvSpPr>
-        <p:spPr>
-          <a:xfrm>
-            <a:off x="1572768" y="5385816"/>
-            <a:ext cx="100584" cy="100584"/>
-          </a:xfrm>
-          <a:prstGeom prst="ellipse">
-            <a:avLst/>
-          </a:prstGeom>
-          <a:solidFill>
-            <a:srgbClr val="028090"/>
-          </a:solidFill>
-          <a:ln>
-            <a:noFill/>
-          </a:ln>
-        </p:spPr>
-        <p:txBody>
-          <a:bodyPr anchorCtr="0" anchor="ctr" bIns="91425" lIns="91425" spcFirstLastPara="1" rIns="91425" wrap="square" tIns="91425">
-            <a:noAutofit/>
-          </a:bodyPr>
-          <a:lstStyle/>
-          <a:p>
-            <a:pPr indent="0" lvl="0" marL="0" rtl="0" algn="l">
-              <a:spcBef>
-                <a:spcPts val="0"/>
-              </a:spcBef>
-              <a:spcAft>
-                <a:spcPts val="0"/>
-              </a:spcAft>
-              <a:buNone/>
-            </a:pPr>
-            <a:r>
-              <a:t/>
-            </a:r>
-            <a:endParaRPr/>
-          </a:p>
-        </p:txBody>
-      </p:sp>
-      <p:sp>
-        <p:nvSpPr>
-          <p:cNvPr id="309" name="Google Shape;309;p8"/>
-          <p:cNvSpPr/>
-          <p:nvPr/>
-        </p:nvSpPr>
-        <p:spPr>
-          <a:xfrm>
-            <a:off x="1828800" y="5303520"/>
-            <a:ext cx="2194560" cy="274320"/>
-          </a:xfrm>
-          <a:prstGeom prst="rect">
-            <a:avLst/>
-          </a:prstGeom>
-          <a:noFill/>
-          <a:ln>
-            <a:noFill/>
-          </a:ln>
-        </p:spPr>
-        <p:txBody>
-          <a:bodyPr anchorCtr="0" anchor="ctr" bIns="0" lIns="0" spcFirstLastPara="1" rIns="0" wrap="square" tIns="0">
-            <a:noAutofit/>
-          </a:bodyPr>
-          <a:lstStyle/>
-          <a:p>
-            <a:pPr indent="0" lvl="0" marL="0" marR="0" rtl="0" algn="l">
-              <a:spcBef>
-                <a:spcPts val="0"/>
-              </a:spcBef>
-              <a:spcAft>
-                <a:spcPts val="0"/>
-              </a:spcAft>
-              <a:buClr>
-                <a:srgbClr val="13272B"/>
-              </a:buClr>
-              <a:buSzPts val="1200"/>
-              <a:buFont typeface="Calibri"/>
-              <a:buNone/>
-            </a:pPr>
-            <a:r>
-              <a:rPr b="0" i="0" lang="en-US" sz="1200" u="none" cap="none" strike="noStrike">
-                <a:solidFill>
-                  <a:srgbClr val="13272B"/>
-                </a:solidFill>
-                <a:latin typeface="Calibri"/>
-                <a:ea typeface="Calibri"/>
-                <a:cs typeface="Calibri"/>
-                <a:sym typeface="Calibri"/>
-              </a:rPr>
-              <a:t>Community support</a:t>
-            </a:r>
-            <a:endParaRPr b="0" i="0" sz="1200" u="none" cap="none" strike="noStrike">
-              <a:solidFill>
-                <a:schemeClr val="dk1"/>
-              </a:solidFill>
-              <a:latin typeface="Calibri"/>
-              <a:ea typeface="Calibri"/>
-              <a:cs typeface="Calibri"/>
-              <a:sym typeface="Calibri"/>
-            </a:endParaRPr>
-          </a:p>
-        </p:txBody>
-      </p:sp>
-      <p:sp>
-        <p:nvSpPr>
           <p:cNvPr id="310" name="Google Shape;310;p8"/>
           <p:cNvSpPr/>
           <p:nvPr/>
@@ -20988,7 +20988,7 @@
                 <a:cs typeface="Calibri"/>
                 <a:sym typeface="Calibri"/>
               </a:rPr>
-              <a:t>Video → SOP generation</a:t>
+              <a:t>Video → SOP, 100 / mo</a:t>
             </a:r>
             <a:endParaRPr b="0" i="0" sz="1200" u="none" cap="none" strike="noStrike">
               <a:solidFill>
@@ -24227,7 +24227,7 @@
                 <a:cs typeface="Calibri"/>
                 <a:sym typeface="Calibri"/>
               </a:rPr>
-              <a:t>Transcription, generation, retrieval</a:t>
+              <a:t>Generation, rewrite, answers</a:t>
             </a:r>
             <a:endParaRPr b="0" i="0" sz="1100" u="none" cap="none" strike="noStrike">
               <a:solidFill>
@@ -24551,7 +24551,7 @@
                 <a:cs typeface="Calibri"/>
                 <a:sym typeface="Calibri"/>
               </a:rPr>
-              <a:t>Vector index</a:t>
+              <a:t>Vector index (TBD)</a:t>
             </a:r>
             <a:endParaRPr b="0" i="0" sz="1150" u="none" cap="none" strike="noStrike">
               <a:solidFill>
@@ -24614,7 +24614,7 @@
                 <a:cs typeface="Calibri"/>
                 <a:sym typeface="Calibri"/>
               </a:rPr>
-              <a:t>One managed MySQL, one Valkey, one object store, one vector index — all on DigitalOcean App Platform. Ships fast, stays cheap to run.</a:t>
+              <a:t>One managed MySQL, one Valkey, one object store, one vector index — all on DigitalOcean App Platform. Speech-to-text, embeddings and vector store: to be selected.</a:t>
             </a:r>
             <a:endParaRPr b="0" i="0" sz="1200" u="none" cap="none" strike="noStrike">
               <a:solidFill>
